--- a/downloads/DCT_V1_Ch06_Slides.pptx
+++ b/downloads/DCT_V1_Ch06_Slides.pptx
@@ -129,7 +129,7 @@
   <p:extLst>
     <p:ext uri="{521415D9-36F7-43E2-AB2F-B90AF26B5E84}">
       <p14:sectionLst xmlns:p14="http://schemas.microsoft.com/office/powerpoint/2010/main">
-        <p14:section name="Opening" id="{0849c2a6-75be-8440-8dcf-99ada910e913}">
+        <p14:section name="Opening" id="{6d359837-b29a-cd91-ec6e-8386d9fdfc42}">
           <p14:sldIdLst>
             <p14:sldId id="256"/>
             <p14:sldId id="257"/>
@@ -137,45 +137,45 @@
             <p14:sldId id="259"/>
           </p14:sldIdLst>
         </p14:section>
-        <p14:section name="6.1 From States to Actions" id="{7cbc54ba-8d57-dfa1-8294-2e8d1ccc72a1}">
+        <p14:section name="6.1 From States to Actions" id="{cd822c69-5902-89a6-2fcf-7205726d66a9}">
           <p14:sldIdLst>
             <p14:sldId id="260"/>
           </p14:sldIdLst>
         </p14:section>
-        <p14:section name="6.2 Transformation as Mapping" id="{fdee1580-4944-78f4-39d8-99e41d3640ba}">
+        <p14:section name="6.2 Transformation as Mapping" id="{6a8553d0-c50b-91ea-b212-1b9a6990dd11}">
           <p14:sldIdLst>
             <p14:sldId id="261"/>
             <p14:sldId id="262"/>
             <p14:sldId id="263"/>
           </p14:sldIdLst>
         </p14:section>
-        <p14:section name="6.3 Composition and the Operator Algebra" id="{2efebd2d-3099-69db-85d6-5027846ccba9}">
+        <p14:section name="6.3 Composition and the Operator Algebra" id="{cd46843d-9e5d-e9a9-09b8-ccda9d065b2b}">
           <p14:sldIdLst>
             <p14:sldId id="264"/>
             <p14:sldId id="265"/>
           </p14:sldIdLst>
         </p14:section>
-        <p14:section name="6.4 Repeated Programs and the Sustainable Core" id="{d37c796e-f910-b6ed-8c49-038d00dd4464}">
+        <p14:section name="6.4 Repeated Programs and the Sustainable Core" id="{607c3bba-823b-9538-70e7-c33568dfd02a}">
           <p14:sldIdLst>
             <p14:sldId id="266"/>
           </p14:sldIdLst>
         </p14:section>
-        <p14:section name="6.5 Feasible Transformations and Constraints" id="{077a5da9-ab5a-b373-13bd-3d0dbef0b5ee}">
+        <p14:section name="6.5 Feasible Transformations and Constraints" id="{45aaa861-fbff-9f53-6bcb-c446b64702e2}">
           <p14:sldIdLst>
             <p14:sldId id="267"/>
           </p14:sldIdLst>
         </p14:section>
-        <p14:section name="6.6 Transformation Paths and Reachability" id="{7ae09d3a-f27d-a33b-f1b2-d8c1582d18a3}">
+        <p14:section name="6.6 Transformation Paths and Reachability" id="{0efbe18e-16d7-6caa-3b80-83329e17b58d}">
           <p14:sldIdLst>
             <p14:sldId id="268"/>
           </p14:sldIdLst>
         </p14:section>
-        <p14:section name="6.7 Transformation Stability" id="{20944aa8-98c0-df78-ba05-3c110274a171}">
+        <p14:section name="6.7 Transformation Stability" id="{668d4bd7-b496-bb76-bf01-357a3b11b992}">
           <p14:sldIdLst>
             <p14:sldId id="269"/>
           </p14:sldIdLst>
         </p14:section>
-        <p14:section name="Worked Example 6.1" id="{4937f19e-606c-d7ce-fd46-c7f87f44d1cd}">
+        <p14:section name="Worked Example 6.1" id="{3133a4ae-e268-bc3a-4cc7-6099579f9d58}">
           <p14:sldIdLst>
             <p14:sldId id="270"/>
             <p14:sldId id="271"/>
@@ -184,12 +184,12 @@
             <p14:sldId id="274"/>
           </p14:sldIdLst>
         </p14:section>
-        <p14:section name="AXIOM Lab 1.6" id="{980f6d70-8ed0-872b-8c15-d1aa6e658e47}">
+        <p14:section name="AXIOM Lab 1.6" id="{f3c127d9-9c44-c554-f318-99adece240f8}">
           <p14:sldIdLst>
             <p14:sldId id="275"/>
           </p14:sldIdLst>
         </p14:section>
-        <p14:section name="Close" id="{cb635597-45ad-33ed-743c-ef0a34718fe3}">
+        <p14:section name="Close" id="{471004d3-23cd-e964-e092-570171a34e79}">
           <p14:sldIdLst>
             <p14:sldId id="276"/>
             <p14:sldId id="277"/>

--- a/downloads/DCT_V1_Ch06_Slides.pptx
+++ b/downloads/DCT_V1_Ch06_Slides.pptx
@@ -129,7 +129,7 @@
   <p:extLst>
     <p:ext uri="{521415D9-36F7-43E2-AB2F-B90AF26B5E84}">
       <p14:sectionLst xmlns:p14="http://schemas.microsoft.com/office/powerpoint/2010/main">
-        <p14:section name="Opening" id="{6d359837-b29a-cd91-ec6e-8386d9fdfc42}">
+        <p14:section name="Opening" id="{346e4214-1715-61f9-bade-05d4d33ab6ff}">
           <p14:sldIdLst>
             <p14:sldId id="256"/>
             <p14:sldId id="257"/>
@@ -137,45 +137,45 @@
             <p14:sldId id="259"/>
           </p14:sldIdLst>
         </p14:section>
-        <p14:section name="6.1 From States to Actions" id="{cd822c69-5902-89a6-2fcf-7205726d66a9}">
+        <p14:section name="6.1 From States to Actions" id="{1b91c401-55de-30e2-29b3-91ec6abca5eb}">
           <p14:sldIdLst>
             <p14:sldId id="260"/>
           </p14:sldIdLst>
         </p14:section>
-        <p14:section name="6.2 Transformation as Mapping" id="{6a8553d0-c50b-91ea-b212-1b9a6990dd11}">
+        <p14:section name="6.2 Transformation as Mapping" id="{24104bca-9d6f-4ded-99cc-f406b00b777b}">
           <p14:sldIdLst>
             <p14:sldId id="261"/>
             <p14:sldId id="262"/>
             <p14:sldId id="263"/>
           </p14:sldIdLst>
         </p14:section>
-        <p14:section name="6.3 Composition and the Operator Algebra" id="{cd46843d-9e5d-e9a9-09b8-ccda9d065b2b}">
+        <p14:section name="6.3 Composition and the Operator Algebra" id="{dd1e9634-f002-515e-6196-6f6002903f0f}">
           <p14:sldIdLst>
             <p14:sldId id="264"/>
             <p14:sldId id="265"/>
           </p14:sldIdLst>
         </p14:section>
-        <p14:section name="6.4 Repeated Programs and the Sustainable Core" id="{607c3bba-823b-9538-70e7-c33568dfd02a}">
+        <p14:section name="6.4 Repeated Programs and the Sustainable Core" id="{3ceed81c-609f-8197-3511-56af05294e13}">
           <p14:sldIdLst>
             <p14:sldId id="266"/>
           </p14:sldIdLst>
         </p14:section>
-        <p14:section name="6.5 Feasible Transformations and Constraints" id="{45aaa861-fbff-9f53-6bcb-c446b64702e2}">
+        <p14:section name="6.5 Feasible Transformations and Constraints" id="{0e85f465-7a82-073b-d31c-41f6e766dac0}">
           <p14:sldIdLst>
             <p14:sldId id="267"/>
           </p14:sldIdLst>
         </p14:section>
-        <p14:section name="6.6 Transformation Paths and Reachability" id="{0efbe18e-16d7-6caa-3b80-83329e17b58d}">
+        <p14:section name="6.6 Transformation Paths and Reachability" id="{6ea8365c-47bc-b2d9-b981-6e1f0fd7ac8d}">
           <p14:sldIdLst>
             <p14:sldId id="268"/>
           </p14:sldIdLst>
         </p14:section>
-        <p14:section name="6.7 Transformation Stability" id="{668d4bd7-b496-bb76-bf01-357a3b11b992}">
+        <p14:section name="6.7 Transformation Stability" id="{45e4e07b-2cfb-c44a-6c51-a5cee9253c71}">
           <p14:sldIdLst>
             <p14:sldId id="269"/>
           </p14:sldIdLst>
         </p14:section>
-        <p14:section name="Worked Example 6.1" id="{3133a4ae-e268-bc3a-4cc7-6099579f9d58}">
+        <p14:section name="Worked Example 6.1" id="{ebaf6cf2-6217-39b5-b6bf-a23582234f41}">
           <p14:sldIdLst>
             <p14:sldId id="270"/>
             <p14:sldId id="271"/>
@@ -184,12 +184,12 @@
             <p14:sldId id="274"/>
           </p14:sldIdLst>
         </p14:section>
-        <p14:section name="AXIOM Lab 1.6" id="{f3c127d9-9c44-c554-f318-99adece240f8}">
+        <p14:section name="AXIOM Lab 1.6" id="{a3b5e761-bfee-d44d-a42f-aaf9e48c4b4e}">
           <p14:sldIdLst>
             <p14:sldId id="275"/>
           </p14:sldIdLst>
         </p14:section>
-        <p14:section name="Close" id="{471004d3-23cd-e964-e092-570171a34e79}">
+        <p14:section name="Close" id="{cf7782ed-0d1c-2bae-3eab-599855ea6e76}">
           <p14:sldIdLst>
             <p14:sldId id="276"/>
             <p14:sldId id="277"/>
